--- a/Content Analysis Agent.pptx
+++ b/Content Analysis Agent.pptx
@@ -10095,7 +10095,7 @@
                 </a:solidFill>
                 <a:latin typeface="Consolas"/>
               </a:rPr>
-              <a:t>0.857</a:t>
+              <a:t>0.745</a:t>
             </a:r>
           </a:p>
         </p:txBody>
@@ -10137,7 +10137,7 @@
                 </a:solidFill>
                 <a:latin typeface="Consolas"/>
               </a:rPr>
-              <a:t>0.760</a:t>
+              <a:t>0.555</a:t>
             </a:r>
           </a:p>
         </p:txBody>
